--- a/assets/figures-editable/c1-c2/c2-e32.pptx
+++ b/assets/figures-editable/c1-c2/c2-e32.pptx
@@ -7,7 +7,7 @@
   <p:sldIdLst>
     <p:sldId id="256" r:id="rId7"/>
   </p:sldIdLst>
-  <p:sldSz cx="11948160" cy="8095488" type="screen4x3"/>
+  <p:sldSz cx="12191695" cy="6858000" type="screen4x3"/>
   <p:notesSz cx="6858000" cy="9144000"/>
   <p:defaultTextStyle>
     <a:defPPr>
@@ -3098,14 +3098,14 @@
       <p:grpSpPr/>
       <p:sp>
         <p:nvSpPr>
-          <p:cNvPr id="2" name="text1" descr="sci-ppt:C2-E32-001"/>
+          <p:cNvPr id="2" name="C2-E32 text 0" descr="sci-ppt:o000"/>
           <p:cNvSpPr txBox="1"/>
           <p:nvPr/>
         </p:nvSpPr>
         <p:spPr>
           <a:xfrm>
-            <a:off x="316992" y="268224"/>
-            <a:ext cx="11277600" cy="359054"/>
+            <a:off x="274320" y="118872"/>
+            <a:ext cx="11612880" cy="340105"/>
           </a:xfrm>
           <a:prstGeom prst="rect">
             <a:avLst/>
@@ -3114,7 +3114,7 @@
           <a:effectLst/>
         </p:spPr>
         <p:txBody>
-          <a:bodyPr wrap="none" lIns="27432" rIns="27432" tIns="18288" bIns="18288" anchor="ctr">
+          <a:bodyPr wrap="none" lIns="18288" rIns="18288" tIns="18288" bIns="18288" anchor="t">
             <a:spAutoFit/>
           </a:bodyPr>
           <a:lstStyle/>
@@ -3125,37 +3125,37 @@
               </a:spcAft>
             </a:pPr>
             <a:r>
-              <a:rPr sz="1823" b="0" i="0">
+              <a:rPr sz="1900" b="1" i="0">
                 <a:solidFill>
                   <a:srgbClr val="8EDBD4"/>
                 </a:solidFill>
                 <a:latin typeface="Arial"/>
               </a:rPr>
-              <a:t>C2-E32 | Physical-variable diagram</a:t>
-            </a:r>
-          </a:p>
-        </p:txBody>
-      </p:sp>
-      <p:sp>
-        <p:nvSpPr>
-          <p:cNvPr id="3" name="rect2" descr="sci-ppt:C2-E32-002"/>
+              <a:t>C2-E32 · Original formulas for Defense 1</a:t>
+            </a:r>
+          </a:p>
+        </p:txBody>
+      </p:sp>
+      <p:sp>
+        <p:nvSpPr>
+          <p:cNvPr id="3" name="C2-E32 round_rect 1" descr="sci-ppt:o001"/>
           <p:cNvSpPr/>
           <p:nvPr/>
         </p:nvSpPr>
         <p:spPr>
           <a:xfrm>
-            <a:off x="3779520" y="1341120"/>
-            <a:ext cx="3169920" cy="2743200"/>
-          </a:xfrm>
-          <a:prstGeom prst="rect">
+            <a:off x="457200" y="1097280"/>
+            <a:ext cx="5532120" cy="1783080"/>
+          </a:xfrm>
+          <a:prstGeom prst="roundRect">
             <a:avLst/>
           </a:prstGeom>
           <a:solidFill>
             <a:srgbClr val="213E4B"/>
           </a:solidFill>
-          <a:ln w="19050">
+          <a:ln w="20320">
             <a:solidFill>
-              <a:srgbClr val="B4C7D2"/>
+              <a:srgbClr val="8EDBD4"/>
             </a:solidFill>
           </a:ln>
           <a:effectLst/>
@@ -3168,88 +3168,48 @@
           </a:p>
         </p:txBody>
       </p:sp>
-      <p:cxnSp>
-        <p:nvCxnSpPr>
-          <p:cNvPr id="4" name="arrow3" descr="sci-ppt:C2-E32-003"/>
-          <p:cNvCxnSpPr/>
+      <p:sp>
+        <p:nvSpPr>
+          <p:cNvPr id="4" name="C2-E32 ellipse 2" descr="sci-ppt:o002"/>
+          <p:cNvSpPr/>
           <p:nvPr/>
-        </p:nvCxnSpPr>
-        <p:spPr>
-          <a:xfrm>
-            <a:off x="1097280" y="2499360"/>
-            <a:ext cx="2560320" cy="0"/>
-          </a:xfrm>
-          <a:prstGeom prst="line">
+        </p:nvSpPr>
+        <p:spPr>
+          <a:xfrm>
+            <a:off x="621792" y="1307592"/>
+            <a:ext cx="493776" cy="493776"/>
+          </a:xfrm>
+          <a:prstGeom prst="ellipse">
             <a:avLst/>
           </a:prstGeom>
-          <a:ln w="25400">
-            <a:solidFill>
-              <a:srgbClr val="F6BC77"/>
-            </a:solidFill>
-            <a:headEnd type="none" w="med" len="med"/>
-            <a:tailEnd type="triangle" w="med" len="med"/>
-          </a:ln>
-          <a:effectLst/>
-        </p:spPr>
-      </p:cxnSp>
-      <p:cxnSp>
-        <p:nvCxnSpPr>
-          <p:cNvPr id="5" name="arrow4" descr="sci-ppt:C2-E32-004"/>
-          <p:cNvCxnSpPr/>
-          <p:nvPr/>
-        </p:nvCxnSpPr>
-        <p:spPr>
-          <a:xfrm>
-            <a:off x="7010400" y="2499360"/>
-            <a:ext cx="2621280" cy="0"/>
-          </a:xfrm>
-          <a:prstGeom prst="line">
-            <a:avLst/>
-          </a:prstGeom>
-          <a:ln w="25400">
+          <a:solidFill>
+            <a:srgbClr val="8EDBD4"/>
+          </a:solidFill>
+          <a:ln w="12700">
             <a:solidFill>
               <a:srgbClr val="8EDBD4"/>
             </a:solidFill>
-            <a:headEnd type="none" w="med" len="med"/>
-            <a:tailEnd type="triangle" w="med" len="med"/>
           </a:ln>
           <a:effectLst/>
         </p:spPr>
-      </p:cxnSp>
-      <p:cxnSp>
-        <p:nvCxnSpPr>
-          <p:cNvPr id="6" name="arrow5" descr="sci-ppt:C2-E32-005"/>
-          <p:cNvCxnSpPr/>
-          <p:nvPr/>
-        </p:nvCxnSpPr>
-        <p:spPr>
-          <a:xfrm flipH="1" flipV="1">
-            <a:off x="2316480" y="1402080"/>
-            <a:ext cx="1463040" cy="1097280"/>
-          </a:xfrm>
-          <a:prstGeom prst="line">
-            <a:avLst/>
-          </a:prstGeom>
-          <a:ln w="25400">
-            <a:solidFill>
-              <a:srgbClr val="8EDBD4"/>
-            </a:solidFill>
-            <a:headEnd type="none" w="med" len="med"/>
-            <a:tailEnd type="triangle" w="med" len="med"/>
-          </a:ln>
-          <a:effectLst/>
-        </p:spPr>
-      </p:cxnSp>
-      <p:sp>
-        <p:nvSpPr>
-          <p:cNvPr id="7" name="text6" descr="sci-ppt:C2-E32-006"/>
+        <p:txBody>
+          <a:bodyPr rtlCol="0" anchor="ctr"/>
+          <a:lstStyle/>
+          <a:p>
+            <a:pPr algn="ctr"/>
+          </a:p>
+        </p:txBody>
+      </p:sp>
+      <p:sp>
+        <p:nvSpPr>
+          <p:cNvPr id="5" name="C2-E32 text 3" descr="sci-ppt:o003"/>
           <p:cNvSpPr txBox="1"/>
           <p:nvPr/>
         </p:nvSpPr>
         <p:spPr>
           <a:xfrm>
-            <a:off x="853440" y="2926080"/>
-            <a:ext cx="2804160" cy="359054"/>
+            <a:off x="758952" y="1371600"/>
+            <a:ext cx="228600" cy="262636"/>
           </a:xfrm>
           <a:prstGeom prst="rect">
             <a:avLst/>
@@ -3258,7 +3218,47 @@
           <a:effectLst/>
         </p:spPr>
         <p:txBody>
-          <a:bodyPr wrap="none" lIns="27432" rIns="27432" tIns="18288" bIns="18288" anchor="ctr">
+          <a:bodyPr wrap="none" lIns="18288" rIns="18288" tIns="18288" bIns="18288" anchor="t">
+            <a:spAutoFit/>
+          </a:bodyPr>
+          <a:lstStyle/>
+          <a:p>
+            <a:pPr algn="ctr">
+              <a:spcAft>
+                <a:spcPts val="0"/>
+              </a:spcAft>
+            </a:pPr>
+            <a:r>
+              <a:rPr sz="1400" b="1" i="0">
+                <a:solidFill>
+                  <a:srgbClr val="142632"/>
+                </a:solidFill>
+                <a:latin typeface="Arial"/>
+              </a:rPr>
+              <a:t>1</a:t>
+            </a:r>
+          </a:p>
+        </p:txBody>
+      </p:sp>
+      <p:sp>
+        <p:nvSpPr>
+          <p:cNvPr id="6" name="C2-E32 text 4" descr="sci-ppt:o004"/>
+          <p:cNvSpPr txBox="1"/>
+          <p:nvPr/>
+        </p:nvSpPr>
+        <p:spPr>
+          <a:xfrm>
+            <a:off x="1280160" y="1207007"/>
+            <a:ext cx="4572000" cy="254889"/>
+          </a:xfrm>
+          <a:prstGeom prst="rect">
+            <a:avLst/>
+          </a:prstGeom>
+          <a:noFill/>
+          <a:effectLst/>
+        </p:spPr>
+        <p:txBody>
+          <a:bodyPr wrap="none" lIns="18288" rIns="18288" tIns="18288" bIns="18288" anchor="t">
             <a:spAutoFit/>
           </a:bodyPr>
           <a:lstStyle/>
@@ -3269,27 +3269,67 @@
               </a:spcAft>
             </a:pPr>
             <a:r>
-              <a:rPr sz="1823" b="0" i="0">
+              <a:rPr sz="1350" b="1" i="0">
+                <a:solidFill>
+                  <a:srgbClr val="8EDBD4"/>
+                </a:solidFill>
+                <a:latin typeface="Arial"/>
+              </a:rPr>
+              <a:t>Optical energy</a:t>
+            </a:r>
+          </a:p>
+        </p:txBody>
+      </p:sp>
+      <p:sp>
+        <p:nvSpPr>
+          <p:cNvPr id="7" name="C2-E32 text 5" descr="sci-ppt:o005"/>
+          <p:cNvSpPr txBox="1"/>
+          <p:nvPr/>
+        </p:nvSpPr>
+        <p:spPr>
+          <a:xfrm>
+            <a:off x="1280160" y="1691640"/>
+            <a:ext cx="4572000" cy="309117"/>
+          </a:xfrm>
+          <a:prstGeom prst="rect">
+            <a:avLst/>
+          </a:prstGeom>
+          <a:noFill/>
+          <a:effectLst/>
+        </p:spPr>
+        <p:txBody>
+          <a:bodyPr wrap="none" lIns="18288" rIns="18288" tIns="18288" bIns="18288" anchor="t">
+            <a:spAutoFit/>
+          </a:bodyPr>
+          <a:lstStyle/>
+          <a:p>
+            <a:pPr algn="l">
+              <a:spcAft>
+                <a:spcPts val="0"/>
+              </a:spcAft>
+            </a:pPr>
+            <a:r>
+              <a:rPr sz="1700" b="1" i="0">
                 <a:solidFill>
                   <a:srgbClr val="E7F0F3"/>
                 </a:solidFill>
                 <a:latin typeface="Arial"/>
               </a:rPr>
-              <a:t>Incident light</a:t>
-            </a:r>
-          </a:p>
-        </p:txBody>
-      </p:sp>
-      <p:sp>
-        <p:nvSpPr>
-          <p:cNvPr id="8" name="text7" descr="sci-ppt:C2-E32-007"/>
+              <a:t>E_L = π w² F₀ / 2</a:t>
+            </a:r>
+          </a:p>
+        </p:txBody>
+      </p:sp>
+      <p:sp>
+        <p:nvSpPr>
+          <p:cNvPr id="8" name="C2-E32 text 6" descr="sci-ppt:o006"/>
           <p:cNvSpPr txBox="1"/>
           <p:nvPr/>
         </p:nvSpPr>
         <p:spPr>
           <a:xfrm>
-            <a:off x="853440" y="975360"/>
-            <a:ext cx="2804160" cy="340156"/>
+            <a:off x="1280160" y="2286000"/>
+            <a:ext cx="4572000" cy="231648"/>
           </a:xfrm>
           <a:prstGeom prst="rect">
             <a:avLst/>
@@ -3298,7 +3338,7 @@
           <a:effectLst/>
         </p:spPr>
         <p:txBody>
-          <a:bodyPr wrap="none" lIns="27432" rIns="27432" tIns="18288" bIns="18288" anchor="ctr">
+          <a:bodyPr wrap="none" lIns="18288" rIns="18288" tIns="18288" bIns="18288" anchor="t">
             <a:spAutoFit/>
           </a:bodyPr>
           <a:lstStyle/>
@@ -3309,27 +3349,211 @@
               </a:spcAft>
             </a:pPr>
             <a:r>
-              <a:rPr sz="1728" b="0" i="0">
+              <a:rPr sz="1200" b="0" i="0">
+                <a:solidFill>
+                  <a:srgbClr val="B4C7D2"/>
+                </a:solidFill>
+                <a:latin typeface="Arial"/>
+              </a:rPr>
+              <a:t>Gaussian beam energy</a:t>
+            </a:r>
+          </a:p>
+        </p:txBody>
+      </p:sp>
+      <p:sp>
+        <p:nvSpPr>
+          <p:cNvPr id="9" name="C2-E32 round_rect 7" descr="sci-ppt:o007"/>
+          <p:cNvSpPr/>
+          <p:nvPr/>
+        </p:nvSpPr>
+        <p:spPr>
+          <a:xfrm>
+            <a:off x="6172200" y="1097280"/>
+            <a:ext cx="5532120" cy="1783080"/>
+          </a:xfrm>
+          <a:prstGeom prst="roundRect">
+            <a:avLst/>
+          </a:prstGeom>
+          <a:solidFill>
+            <a:srgbClr val="213E4B"/>
+          </a:solidFill>
+          <a:ln w="20320">
+            <a:solidFill>
+              <a:srgbClr val="F2B880"/>
+            </a:solidFill>
+          </a:ln>
+          <a:effectLst/>
+        </p:spPr>
+        <p:txBody>
+          <a:bodyPr rtlCol="0" anchor="ctr"/>
+          <a:lstStyle/>
+          <a:p>
+            <a:pPr algn="ctr"/>
+          </a:p>
+        </p:txBody>
+      </p:sp>
+      <p:sp>
+        <p:nvSpPr>
+          <p:cNvPr id="10" name="C2-E32 ellipse 8" descr="sci-ppt:o008"/>
+          <p:cNvSpPr/>
+          <p:nvPr/>
+        </p:nvSpPr>
+        <p:spPr>
+          <a:xfrm>
+            <a:off x="6336792" y="1307592"/>
+            <a:ext cx="493776" cy="493776"/>
+          </a:xfrm>
+          <a:prstGeom prst="ellipse">
+            <a:avLst/>
+          </a:prstGeom>
+          <a:solidFill>
+            <a:srgbClr val="F2B880"/>
+          </a:solidFill>
+          <a:ln w="12700">
+            <a:solidFill>
+              <a:srgbClr val="F2B880"/>
+            </a:solidFill>
+          </a:ln>
+          <a:effectLst/>
+        </p:spPr>
+        <p:txBody>
+          <a:bodyPr rtlCol="0" anchor="ctr"/>
+          <a:lstStyle/>
+          <a:p>
+            <a:pPr algn="ctr"/>
+          </a:p>
+        </p:txBody>
+      </p:sp>
+      <p:sp>
+        <p:nvSpPr>
+          <p:cNvPr id="11" name="C2-E32 text 9" descr="sci-ppt:o009"/>
+          <p:cNvSpPr txBox="1"/>
+          <p:nvPr/>
+        </p:nvSpPr>
+        <p:spPr>
+          <a:xfrm>
+            <a:off x="6473952" y="1371600"/>
+            <a:ext cx="228600" cy="262636"/>
+          </a:xfrm>
+          <a:prstGeom prst="rect">
+            <a:avLst/>
+          </a:prstGeom>
+          <a:noFill/>
+          <a:effectLst/>
+        </p:spPr>
+        <p:txBody>
+          <a:bodyPr wrap="none" lIns="18288" rIns="18288" tIns="18288" bIns="18288" anchor="t">
+            <a:spAutoFit/>
+          </a:bodyPr>
+          <a:lstStyle/>
+          <a:p>
+            <a:pPr algn="ctr">
+              <a:spcAft>
+                <a:spcPts val="0"/>
+              </a:spcAft>
+            </a:pPr>
+            <a:r>
+              <a:rPr sz="1400" b="1" i="0">
+                <a:solidFill>
+                  <a:srgbClr val="142632"/>
+                </a:solidFill>
+                <a:latin typeface="Arial"/>
+              </a:rPr>
+              <a:t>2</a:t>
+            </a:r>
+          </a:p>
+        </p:txBody>
+      </p:sp>
+      <p:sp>
+        <p:nvSpPr>
+          <p:cNvPr id="12" name="C2-E32 text 10" descr="sci-ppt:o010"/>
+          <p:cNvSpPr txBox="1"/>
+          <p:nvPr/>
+        </p:nvSpPr>
+        <p:spPr>
+          <a:xfrm>
+            <a:off x="6995160" y="1207007"/>
+            <a:ext cx="4572000" cy="254889"/>
+          </a:xfrm>
+          <a:prstGeom prst="rect">
+            <a:avLst/>
+          </a:prstGeom>
+          <a:noFill/>
+          <a:effectLst/>
+        </p:spPr>
+        <p:txBody>
+          <a:bodyPr wrap="none" lIns="18288" rIns="18288" tIns="18288" bIns="18288" anchor="t">
+            <a:spAutoFit/>
+          </a:bodyPr>
+          <a:lstStyle/>
+          <a:p>
+            <a:pPr algn="l">
+              <a:spcAft>
+                <a:spcPts val="0"/>
+              </a:spcAft>
+            </a:pPr>
+            <a:r>
+              <a:rPr sz="1350" b="1" i="0">
+                <a:solidFill>
+                  <a:srgbClr val="F2B880"/>
+                </a:solidFill>
+                <a:latin typeface="Arial"/>
+              </a:rPr>
+              <a:t>Absorbed share</a:t>
+            </a:r>
+          </a:p>
+        </p:txBody>
+      </p:sp>
+      <p:sp>
+        <p:nvSpPr>
+          <p:cNvPr id="13" name="C2-E32 text 11" descr="sci-ppt:o011"/>
+          <p:cNvSpPr txBox="1"/>
+          <p:nvPr/>
+        </p:nvSpPr>
+        <p:spPr>
+          <a:xfrm>
+            <a:off x="6995160" y="1691640"/>
+            <a:ext cx="4572000" cy="309117"/>
+          </a:xfrm>
+          <a:prstGeom prst="rect">
+            <a:avLst/>
+          </a:prstGeom>
+          <a:noFill/>
+          <a:effectLst/>
+        </p:spPr>
+        <p:txBody>
+          <a:bodyPr wrap="none" lIns="18288" rIns="18288" tIns="18288" bIns="18288" anchor="t">
+            <a:spAutoFit/>
+          </a:bodyPr>
+          <a:lstStyle/>
+          <a:p>
+            <a:pPr algn="l">
+              <a:spcAft>
+                <a:spcPts val="0"/>
+              </a:spcAft>
+            </a:pPr>
+            <a:r>
+              <a:rPr sz="1700" b="1" i="0">
                 <a:solidFill>
                   <a:srgbClr val="E7F0F3"/>
                 </a:solidFill>
                 <a:latin typeface="Arial"/>
               </a:rPr>
-              <a:t>Reflection</a:t>
-            </a:r>
-          </a:p>
-        </p:txBody>
-      </p:sp>
-      <p:sp>
-        <p:nvSpPr>
-          <p:cNvPr id="9" name="text8" descr="sci-ppt:C2-E32-008"/>
+              <a:t>E_abs = f_geo A_λ E_L</a:t>
+            </a:r>
+          </a:p>
+        </p:txBody>
+      </p:sp>
+      <p:sp>
+        <p:nvSpPr>
+          <p:cNvPr id="14" name="C2-E32 text 12" descr="sci-ppt:o012"/>
           <p:cNvSpPr txBox="1"/>
           <p:nvPr/>
         </p:nvSpPr>
         <p:spPr>
           <a:xfrm>
-            <a:off x="4084320" y="3048000"/>
-            <a:ext cx="3048000" cy="359054"/>
+            <a:off x="6995160" y="2286000"/>
+            <a:ext cx="4572000" cy="231648"/>
           </a:xfrm>
           <a:prstGeom prst="rect">
             <a:avLst/>
@@ -3338,7 +3562,7 @@
           <a:effectLst/>
         </p:spPr>
         <p:txBody>
-          <a:bodyPr wrap="none" lIns="27432" rIns="27432" tIns="18288" bIns="18288" anchor="ctr">
+          <a:bodyPr wrap="none" lIns="18288" rIns="18288" tIns="18288" bIns="18288" anchor="t">
             <a:spAutoFit/>
           </a:bodyPr>
           <a:lstStyle/>
@@ -3349,27 +3573,211 @@
               </a:spcAft>
             </a:pPr>
             <a:r>
-              <a:rPr sz="1823" b="0" i="0">
+              <a:rPr sz="1200" b="0" i="0">
+                <a:solidFill>
+                  <a:srgbClr val="B4C7D2"/>
+                </a:solidFill>
+                <a:latin typeface="Arial"/>
+              </a:rPr>
+              <a:t>aperture × absorptance</a:t>
+            </a:r>
+          </a:p>
+        </p:txBody>
+      </p:sp>
+      <p:sp>
+        <p:nvSpPr>
+          <p:cNvPr id="15" name="C2-E32 round_rect 13" descr="sci-ppt:o013"/>
+          <p:cNvSpPr/>
+          <p:nvPr/>
+        </p:nvSpPr>
+        <p:spPr>
+          <a:xfrm>
+            <a:off x="457200" y="3063239"/>
+            <a:ext cx="5532120" cy="1783080"/>
+          </a:xfrm>
+          <a:prstGeom prst="roundRect">
+            <a:avLst/>
+          </a:prstGeom>
+          <a:solidFill>
+            <a:srgbClr val="213E4B"/>
+          </a:solidFill>
+          <a:ln w="20320">
+            <a:solidFill>
+              <a:srgbClr val="7FC8F8"/>
+            </a:solidFill>
+          </a:ln>
+          <a:effectLst/>
+        </p:spPr>
+        <p:txBody>
+          <a:bodyPr rtlCol="0" anchor="ctr"/>
+          <a:lstStyle/>
+          <a:p>
+            <a:pPr algn="ctr"/>
+          </a:p>
+        </p:txBody>
+      </p:sp>
+      <p:sp>
+        <p:nvSpPr>
+          <p:cNvPr id="16" name="C2-E32 ellipse 14" descr="sci-ppt:o014"/>
+          <p:cNvSpPr/>
+          <p:nvPr/>
+        </p:nvSpPr>
+        <p:spPr>
+          <a:xfrm>
+            <a:off x="621792" y="3273551"/>
+            <a:ext cx="493776" cy="493776"/>
+          </a:xfrm>
+          <a:prstGeom prst="ellipse">
+            <a:avLst/>
+          </a:prstGeom>
+          <a:solidFill>
+            <a:srgbClr val="7FC8F8"/>
+          </a:solidFill>
+          <a:ln w="12700">
+            <a:solidFill>
+              <a:srgbClr val="7FC8F8"/>
+            </a:solidFill>
+          </a:ln>
+          <a:effectLst/>
+        </p:spPr>
+        <p:txBody>
+          <a:bodyPr rtlCol="0" anchor="ctr"/>
+          <a:lstStyle/>
+          <a:p>
+            <a:pPr algn="ctr"/>
+          </a:p>
+        </p:txBody>
+      </p:sp>
+      <p:sp>
+        <p:nvSpPr>
+          <p:cNvPr id="17" name="C2-E32 text 15" descr="sci-ppt:o015"/>
+          <p:cNvSpPr txBox="1"/>
+          <p:nvPr/>
+        </p:nvSpPr>
+        <p:spPr>
+          <a:xfrm>
+            <a:off x="758952" y="3337559"/>
+            <a:ext cx="228600" cy="262636"/>
+          </a:xfrm>
+          <a:prstGeom prst="rect">
+            <a:avLst/>
+          </a:prstGeom>
+          <a:noFill/>
+          <a:effectLst/>
+        </p:spPr>
+        <p:txBody>
+          <a:bodyPr wrap="none" lIns="18288" rIns="18288" tIns="18288" bIns="18288" anchor="t">
+            <a:spAutoFit/>
+          </a:bodyPr>
+          <a:lstStyle/>
+          <a:p>
+            <a:pPr algn="ctr">
+              <a:spcAft>
+                <a:spcPts val="0"/>
+              </a:spcAft>
+            </a:pPr>
+            <a:r>
+              <a:rPr sz="1400" b="1" i="0">
+                <a:solidFill>
+                  <a:srgbClr val="142632"/>
+                </a:solidFill>
+                <a:latin typeface="Arial"/>
+              </a:rPr>
+              <a:t>3</a:t>
+            </a:r>
+          </a:p>
+        </p:txBody>
+      </p:sp>
+      <p:sp>
+        <p:nvSpPr>
+          <p:cNvPr id="18" name="C2-E32 text 16" descr="sci-ppt:o016"/>
+          <p:cNvSpPr txBox="1"/>
+          <p:nvPr/>
+        </p:nvSpPr>
+        <p:spPr>
+          <a:xfrm>
+            <a:off x="1280160" y="3172968"/>
+            <a:ext cx="4572000" cy="254889"/>
+          </a:xfrm>
+          <a:prstGeom prst="rect">
+            <a:avLst/>
+          </a:prstGeom>
+          <a:noFill/>
+          <a:effectLst/>
+        </p:spPr>
+        <p:txBody>
+          <a:bodyPr wrap="none" lIns="18288" rIns="18288" tIns="18288" bIns="18288" anchor="t">
+            <a:spAutoFit/>
+          </a:bodyPr>
+          <a:lstStyle/>
+          <a:p>
+            <a:pPr algn="l">
+              <a:spcAft>
+                <a:spcPts val="0"/>
+              </a:spcAft>
+            </a:pPr>
+            <a:r>
+              <a:rPr sz="1350" b="1" i="0">
+                <a:solidFill>
+                  <a:srgbClr val="7FC8F8"/>
+                </a:solidFill>
+                <a:latin typeface="Arial"/>
+              </a:rPr>
+              <a:t>Where the heat goes</a:t>
+            </a:r>
+          </a:p>
+        </p:txBody>
+      </p:sp>
+      <p:sp>
+        <p:nvSpPr>
+          <p:cNvPr id="19" name="C2-E32 text 17" descr="sci-ppt:o017"/>
+          <p:cNvSpPr txBox="1"/>
+          <p:nvPr/>
+        </p:nvSpPr>
+        <p:spPr>
+          <a:xfrm>
+            <a:off x="1280160" y="3657599"/>
+            <a:ext cx="4572000" cy="309117"/>
+          </a:xfrm>
+          <a:prstGeom prst="rect">
+            <a:avLst/>
+          </a:prstGeom>
+          <a:noFill/>
+          <a:effectLst/>
+        </p:spPr>
+        <p:txBody>
+          <a:bodyPr wrap="none" lIns="18288" rIns="18288" tIns="18288" bIns="18288" anchor="t">
+            <a:spAutoFit/>
+          </a:bodyPr>
+          <a:lstStyle/>
+          <a:p>
+            <a:pPr algn="l">
+              <a:spcAft>
+                <a:spcPts val="0"/>
+              </a:spcAft>
+            </a:pPr>
+            <a:r>
+              <a:rPr sz="1700" b="1" i="0">
                 <a:solidFill>
                   <a:srgbClr val="E7F0F3"/>
                 </a:solidFill>
                 <a:latin typeface="Arial"/>
               </a:rPr>
-              <a:t>Absorber: Q_abs</a:t>
-            </a:r>
-          </a:p>
-        </p:txBody>
-      </p:sp>
-      <p:sp>
-        <p:nvSpPr>
-          <p:cNvPr id="10" name="text9" descr="sci-ppt:C2-E32-009"/>
+              <a:t>tₜₕ ~ Lₕ² / α</a:t>
+            </a:r>
+          </a:p>
+        </p:txBody>
+      </p:sp>
+      <p:sp>
+        <p:nvSpPr>
+          <p:cNvPr id="20" name="C2-E32 text 18" descr="sci-ppt:o018"/>
           <p:cNvSpPr txBox="1"/>
           <p:nvPr/>
         </p:nvSpPr>
         <p:spPr>
           <a:xfrm>
-            <a:off x="7315200" y="2926080"/>
-            <a:ext cx="3657600" cy="359054"/>
+            <a:off x="1280160" y="4251959"/>
+            <a:ext cx="4572000" cy="231648"/>
           </a:xfrm>
           <a:prstGeom prst="rect">
             <a:avLst/>
@@ -3378,7 +3786,7 @@
           <a:effectLst/>
         </p:spPr>
         <p:txBody>
-          <a:bodyPr wrap="none" lIns="27432" rIns="27432" tIns="18288" bIns="18288" anchor="ctr">
+          <a:bodyPr wrap="none" lIns="18288" rIns="18288" tIns="18288" bIns="18288" anchor="t">
             <a:spAutoFit/>
           </a:bodyPr>
           <a:lstStyle/>
@@ -3389,51 +3797,211 @@
               </a:spcAft>
             </a:pPr>
             <a:r>
-              <a:rPr sz="1823" b="0" i="0">
+              <a:rPr sz="1200" b="0" i="0">
+                <a:solidFill>
+                  <a:srgbClr val="B4C7D2"/>
+                </a:solidFill>
+                <a:latin typeface="Arial"/>
+              </a:rPr>
+              <a:t>time to cross a distance</a:t>
+            </a:r>
+          </a:p>
+        </p:txBody>
+      </p:sp>
+      <p:sp>
+        <p:nvSpPr>
+          <p:cNvPr id="21" name="C2-E32 round_rect 19" descr="sci-ppt:o019"/>
+          <p:cNvSpPr/>
+          <p:nvPr/>
+        </p:nvSpPr>
+        <p:spPr>
+          <a:xfrm>
+            <a:off x="6172200" y="3063239"/>
+            <a:ext cx="5532120" cy="1783080"/>
+          </a:xfrm>
+          <a:prstGeom prst="roundRect">
+            <a:avLst/>
+          </a:prstGeom>
+          <a:solidFill>
+            <a:srgbClr val="213E4B"/>
+          </a:solidFill>
+          <a:ln w="20320">
+            <a:solidFill>
+              <a:srgbClr val="F28BA0"/>
+            </a:solidFill>
+          </a:ln>
+          <a:effectLst/>
+        </p:spPr>
+        <p:txBody>
+          <a:bodyPr rtlCol="0" anchor="ctr"/>
+          <a:lstStyle/>
+          <a:p>
+            <a:pPr algn="ctr"/>
+          </a:p>
+        </p:txBody>
+      </p:sp>
+      <p:sp>
+        <p:nvSpPr>
+          <p:cNvPr id="22" name="C2-E32 ellipse 20" descr="sci-ppt:o020"/>
+          <p:cNvSpPr/>
+          <p:nvPr/>
+        </p:nvSpPr>
+        <p:spPr>
+          <a:xfrm>
+            <a:off x="6336792" y="3273551"/>
+            <a:ext cx="493776" cy="493776"/>
+          </a:xfrm>
+          <a:prstGeom prst="ellipse">
+            <a:avLst/>
+          </a:prstGeom>
+          <a:solidFill>
+            <a:srgbClr val="F28BA0"/>
+          </a:solidFill>
+          <a:ln w="12700">
+            <a:solidFill>
+              <a:srgbClr val="F28BA0"/>
+            </a:solidFill>
+          </a:ln>
+          <a:effectLst/>
+        </p:spPr>
+        <p:txBody>
+          <a:bodyPr rtlCol="0" anchor="ctr"/>
+          <a:lstStyle/>
+          <a:p>
+            <a:pPr algn="ctr"/>
+          </a:p>
+        </p:txBody>
+      </p:sp>
+      <p:sp>
+        <p:nvSpPr>
+          <p:cNvPr id="23" name="C2-E32 text 21" descr="sci-ppt:o021"/>
+          <p:cNvSpPr txBox="1"/>
+          <p:nvPr/>
+        </p:nvSpPr>
+        <p:spPr>
+          <a:xfrm>
+            <a:off x="6473952" y="3337559"/>
+            <a:ext cx="228600" cy="262636"/>
+          </a:xfrm>
+          <a:prstGeom prst="rect">
+            <a:avLst/>
+          </a:prstGeom>
+          <a:noFill/>
+          <a:effectLst/>
+        </p:spPr>
+        <p:txBody>
+          <a:bodyPr wrap="none" lIns="18288" rIns="18288" tIns="18288" bIns="18288" anchor="t">
+            <a:spAutoFit/>
+          </a:bodyPr>
+          <a:lstStyle/>
+          <a:p>
+            <a:pPr algn="ctr">
+              <a:spcAft>
+                <a:spcPts val="0"/>
+              </a:spcAft>
+            </a:pPr>
+            <a:r>
+              <a:rPr sz="1400" b="1" i="0">
+                <a:solidFill>
+                  <a:srgbClr val="142632"/>
+                </a:solidFill>
+                <a:latin typeface="Arial"/>
+              </a:rPr>
+              <a:t>4</a:t>
+            </a:r>
+          </a:p>
+        </p:txBody>
+      </p:sp>
+      <p:sp>
+        <p:nvSpPr>
+          <p:cNvPr id="24" name="C2-E32 text 22" descr="sci-ppt:o022"/>
+          <p:cNvSpPr txBox="1"/>
+          <p:nvPr/>
+        </p:nvSpPr>
+        <p:spPr>
+          <a:xfrm>
+            <a:off x="6995160" y="3172968"/>
+            <a:ext cx="4572000" cy="254889"/>
+          </a:xfrm>
+          <a:prstGeom prst="rect">
+            <a:avLst/>
+          </a:prstGeom>
+          <a:noFill/>
+          <a:effectLst/>
+        </p:spPr>
+        <p:txBody>
+          <a:bodyPr wrap="none" lIns="18288" rIns="18288" tIns="18288" bIns="18288" anchor="t">
+            <a:spAutoFit/>
+          </a:bodyPr>
+          <a:lstStyle/>
+          <a:p>
+            <a:pPr algn="l">
+              <a:spcAft>
+                <a:spcPts val="0"/>
+              </a:spcAft>
+            </a:pPr>
+            <a:r>
+              <a:rPr sz="1350" b="1" i="0">
+                <a:solidFill>
+                  <a:srgbClr val="F28BA0"/>
+                </a:solidFill>
+                <a:latin typeface="Arial"/>
+              </a:rPr>
+              <a:t>Penetration</a:t>
+            </a:r>
+          </a:p>
+        </p:txBody>
+      </p:sp>
+      <p:sp>
+        <p:nvSpPr>
+          <p:cNvPr id="25" name="C2-E32 text 23" descr="sci-ppt:o023"/>
+          <p:cNvSpPr txBox="1"/>
+          <p:nvPr/>
+        </p:nvSpPr>
+        <p:spPr>
+          <a:xfrm>
+            <a:off x="6995160" y="3657599"/>
+            <a:ext cx="4572000" cy="309117"/>
+          </a:xfrm>
+          <a:prstGeom prst="rect">
+            <a:avLst/>
+          </a:prstGeom>
+          <a:noFill/>
+          <a:effectLst/>
+        </p:spPr>
+        <p:txBody>
+          <a:bodyPr wrap="none" lIns="18288" rIns="18288" tIns="18288" bIns="18288" anchor="t">
+            <a:spAutoFit/>
+          </a:bodyPr>
+          <a:lstStyle/>
+          <a:p>
+            <a:pPr algn="l">
+              <a:spcAft>
+                <a:spcPts val="0"/>
+              </a:spcAft>
+            </a:pPr>
+            <a:r>
+              <a:rPr sz="1700" b="1" i="0">
                 <a:solidFill>
                   <a:srgbClr val="E7F0F3"/>
                 </a:solidFill>
                 <a:latin typeface="Arial"/>
               </a:rPr>
-              <a:t>Transmitted light</a:t>
-            </a:r>
-          </a:p>
-        </p:txBody>
-      </p:sp>
-      <p:cxnSp>
-        <p:nvCxnSpPr>
-          <p:cNvPr id="11" name="arrow10" descr="sci-ppt:C2-E32-010"/>
-          <p:cNvCxnSpPr/>
-          <p:nvPr/>
-        </p:nvCxnSpPr>
-        <p:spPr>
-          <a:xfrm>
-            <a:off x="4023360" y="3779520"/>
-            <a:ext cx="2682240" cy="0"/>
-          </a:xfrm>
-          <a:prstGeom prst="line">
-            <a:avLst/>
-          </a:prstGeom>
-          <a:ln w="25400">
-            <a:solidFill>
-              <a:srgbClr val="8EDBD4"/>
-            </a:solidFill>
-            <a:headEnd type="none" w="med" len="med"/>
-            <a:tailEnd type="triangle" w="med" len="med"/>
-          </a:ln>
-          <a:effectLst/>
-        </p:spPr>
-      </p:cxnSp>
-      <p:sp>
-        <p:nvSpPr>
-          <p:cNvPr id="12" name="text11" descr="sci-ppt:C2-E32-011"/>
+              <a:t>δ_T ~ √(α τₕ)</a:t>
+            </a:r>
+          </a:p>
+        </p:txBody>
+      </p:sp>
+      <p:sp>
+        <p:nvSpPr>
+          <p:cNvPr id="26" name="C2-E32 text 24" descr="sci-ppt:o024"/>
           <p:cNvSpPr txBox="1"/>
           <p:nvPr/>
         </p:nvSpPr>
         <p:spPr>
           <a:xfrm>
-            <a:off x="4511040" y="4023360"/>
-            <a:ext cx="4267200" cy="340156"/>
+            <a:off x="6995160" y="4251959"/>
+            <a:ext cx="4572000" cy="231648"/>
           </a:xfrm>
           <a:prstGeom prst="rect">
             <a:avLst/>
@@ -3442,7 +4010,7 @@
           <a:effectLst/>
         </p:spPr>
         <p:txBody>
-          <a:bodyPr wrap="none" lIns="27432" rIns="27432" tIns="18288" bIns="18288" anchor="ctr">
+          <a:bodyPr wrap="none" lIns="18288" rIns="18288" tIns="18288" bIns="18288" anchor="t">
             <a:spAutoFit/>
           </a:bodyPr>
           <a:lstStyle/>
@@ -3453,27 +4021,107 @@
               </a:spcAft>
             </a:pPr>
             <a:r>
-              <a:rPr sz="1728" b="0" i="0">
+              <a:rPr sz="1200" b="0" i="0">
+                <a:solidFill>
+                  <a:srgbClr val="B4C7D2"/>
+                </a:solidFill>
+                <a:latin typeface="Arial"/>
+              </a:rPr>
+              <a:t>distance reached in the pulse</a:t>
+            </a:r>
+          </a:p>
+        </p:txBody>
+      </p:sp>
+      <p:sp>
+        <p:nvSpPr>
+          <p:cNvPr id="27" name="C2-E32 text 25" descr="sci-ppt:o025"/>
+          <p:cNvSpPr txBox="1"/>
+          <p:nvPr/>
+        </p:nvSpPr>
+        <p:spPr>
+          <a:xfrm>
+            <a:off x="457200" y="5166360"/>
+            <a:ext cx="11247120" cy="254889"/>
+          </a:xfrm>
+          <a:prstGeom prst="rect">
+            <a:avLst/>
+          </a:prstGeom>
+          <a:noFill/>
+          <a:effectLst/>
+        </p:spPr>
+        <p:txBody>
+          <a:bodyPr wrap="none" lIns="18288" rIns="18288" tIns="18288" bIns="18288" anchor="t">
+            <a:spAutoFit/>
+          </a:bodyPr>
+          <a:lstStyle/>
+          <a:p>
+            <a:pPr algn="l">
+              <a:spcAft>
+                <a:spcPts val="0"/>
+              </a:spcAft>
+            </a:pPr>
+            <a:r>
+              <a:rPr sz="1350" b="0" i="0">
+                <a:solidFill>
+                  <a:srgbClr val="F2B880"/>
+                </a:solidFill>
+                <a:latin typeface="Arial"/>
+              </a:rPr>
+              <a:t>Light must be intercepted, absorbed, and then conducted to the PFC. Each step has its own formula and its own limit.</a:t>
+            </a:r>
+          </a:p>
+        </p:txBody>
+      </p:sp>
+      <p:sp>
+        <p:nvSpPr>
+          <p:cNvPr id="28" name="C2-E32 text 26" descr="sci-ppt:o026"/>
+          <p:cNvSpPr txBox="1"/>
+          <p:nvPr/>
+        </p:nvSpPr>
+        <p:spPr>
+          <a:xfrm>
+            <a:off x="457200" y="5669280"/>
+            <a:ext cx="11247120" cy="239395"/>
+          </a:xfrm>
+          <a:prstGeom prst="rect">
+            <a:avLst/>
+          </a:prstGeom>
+          <a:noFill/>
+          <a:effectLst/>
+        </p:spPr>
+        <p:txBody>
+          <a:bodyPr wrap="none" lIns="18288" rIns="18288" tIns="18288" bIns="18288" anchor="t">
+            <a:spAutoFit/>
+          </a:bodyPr>
+          <a:lstStyle/>
+          <a:p>
+            <a:pPr algn="l">
+              <a:spcAft>
+                <a:spcPts val="0"/>
+              </a:spcAft>
+            </a:pPr>
+            <a:r>
+              <a:rPr sz="1250" b="0" i="0">
                 <a:solidFill>
                   <a:srgbClr val="E7F0F3"/>
                 </a:solidFill>
                 <a:latin typeface="Arial"/>
               </a:rPr>
-              <a:t>+z; thickness h_a</a:t>
-            </a:r>
-          </a:p>
-        </p:txBody>
-      </p:sp>
-      <p:sp>
-        <p:nvSpPr>
-          <p:cNvPr id="13" name="text12" descr="sci-ppt:C2-E32-012"/>
+              <a:t>A short pulse does not imply uniform temperature: compare the heat penetration δ_T with the distance to the PFC.</a:t>
+            </a:r>
+          </a:p>
+        </p:txBody>
+      </p:sp>
+      <p:sp>
+        <p:nvSpPr>
+          <p:cNvPr id="29" name="C2-E32 text 27" descr="sci-ppt:o027"/>
           <p:cNvSpPr txBox="1"/>
           <p:nvPr/>
         </p:nvSpPr>
         <p:spPr>
           <a:xfrm>
-            <a:off x="365760" y="4974336"/>
-            <a:ext cx="5547360" cy="321259"/>
+            <a:off x="320040" y="6510528"/>
+            <a:ext cx="11521440" cy="200660"/>
           </a:xfrm>
           <a:prstGeom prst="rect">
             <a:avLst/>
@@ -3482,7 +4130,7 @@
           <a:effectLst/>
         </p:spPr>
         <p:txBody>
-          <a:bodyPr wrap="none" lIns="27432" rIns="27432" tIns="18288" bIns="18288" anchor="ctr">
+          <a:bodyPr wrap="none" lIns="18288" rIns="18288" tIns="18288" bIns="18288" anchor="t">
             <a:spAutoFit/>
           </a:bodyPr>
           <a:lstStyle/>
@@ -3493,333 +4141,13 @@
               </a:spcAft>
             </a:pPr>
             <a:r>
-              <a:rPr sz="1632" b="0" i="0">
-                <a:solidFill>
-                  <a:srgbClr val="E7F0F3"/>
-                </a:solidFill>
-                <a:latin typeface="Arial"/>
-              </a:rPr>
-              <a:t>E_L, w, F₀: incident beam</a:t>
-            </a:r>
-          </a:p>
-        </p:txBody>
-      </p:sp>
-      <p:sp>
-        <p:nvSpPr>
-          <p:cNvPr id="14" name="text13" descr="sci-ppt:C2-E32-013"/>
-          <p:cNvSpPr txBox="1"/>
-          <p:nvPr/>
-        </p:nvSpPr>
-        <p:spPr>
-          <a:xfrm>
-            <a:off x="365760" y="5266944"/>
-            <a:ext cx="5547360" cy="321259"/>
-          </a:xfrm>
-          <a:prstGeom prst="rect">
-            <a:avLst/>
-          </a:prstGeom>
-          <a:noFill/>
-          <a:effectLst/>
-        </p:spPr>
-        <p:txBody>
-          <a:bodyPr wrap="none" lIns="27432" rIns="27432" tIns="18288" bIns="18288" anchor="ctr">
-            <a:spAutoFit/>
-          </a:bodyPr>
-          <a:lstStyle/>
-          <a:p>
-            <a:pPr algn="l">
-              <a:spcAft>
-                <a:spcPts val="0"/>
-              </a:spcAft>
-            </a:pPr>
-            <a:r>
-              <a:rPr sz="1632" b="0" i="0">
-                <a:solidFill>
-                  <a:srgbClr val="E7F0F3"/>
-                </a:solidFill>
-                <a:latin typeface="Arial"/>
-              </a:rPr>
-              <a:t>E_abs: absorber budget</a:t>
-            </a:r>
-          </a:p>
-        </p:txBody>
-      </p:sp>
-      <p:sp>
-        <p:nvSpPr>
-          <p:cNvPr id="15" name="text14" descr="sci-ppt:C2-E32-014"/>
-          <p:cNvSpPr txBox="1"/>
-          <p:nvPr/>
-        </p:nvSpPr>
-        <p:spPr>
-          <a:xfrm>
-            <a:off x="365760" y="5559552"/>
-            <a:ext cx="5547360" cy="321259"/>
-          </a:xfrm>
-          <a:prstGeom prst="rect">
-            <a:avLst/>
-          </a:prstGeom>
-          <a:noFill/>
-          <a:effectLst/>
-        </p:spPr>
-        <p:txBody>
-          <a:bodyPr wrap="none" lIns="27432" rIns="27432" tIns="18288" bIns="18288" anchor="ctr">
-            <a:spAutoFit/>
-          </a:bodyPr>
-          <a:lstStyle/>
-          <a:p>
-            <a:pPr algn="l">
-              <a:spcAft>
-                <a:spcPts val="0"/>
-              </a:spcAft>
-            </a:pPr>
-            <a:r>
-              <a:rPr sz="1632" b="0" i="0">
-                <a:solidFill>
-                  <a:srgbClr val="E7F0F3"/>
-                </a:solidFill>
-                <a:latin typeface="Arial"/>
-              </a:rPr>
-              <a:t>α, τ_h: heat propagation</a:t>
-            </a:r>
-          </a:p>
-        </p:txBody>
-      </p:sp>
-      <p:sp>
-        <p:nvSpPr>
-          <p:cNvPr id="16" name="text15" descr="sci-ppt:C2-E32-015"/>
-          <p:cNvSpPr txBox="1"/>
-          <p:nvPr/>
-        </p:nvSpPr>
-        <p:spPr>
-          <a:xfrm>
-            <a:off x="365760" y="5852160"/>
-            <a:ext cx="5547360" cy="321259"/>
-          </a:xfrm>
-          <a:prstGeom prst="rect">
-            <a:avLst/>
-          </a:prstGeom>
-          <a:noFill/>
-          <a:effectLst/>
-        </p:spPr>
-        <p:txBody>
-          <a:bodyPr wrap="none" lIns="27432" rIns="27432" tIns="18288" bIns="18288" anchor="ctr">
-            <a:spAutoFit/>
-          </a:bodyPr>
-          <a:lstStyle/>
-          <a:p>
-            <a:pPr algn="l">
-              <a:spcAft>
-                <a:spcPts val="0"/>
-              </a:spcAft>
-            </a:pPr>
-            <a:r>
-              <a:rPr sz="1632" b="0" i="0">
-                <a:solidFill>
-                  <a:srgbClr val="E7F0F3"/>
-                </a:solidFill>
-                <a:latin typeface="Arial"/>
-              </a:rPr>
-              <a:t>π: Gaussian area factor</a:t>
-            </a:r>
-          </a:p>
-        </p:txBody>
-      </p:sp>
-      <p:sp>
-        <p:nvSpPr>
-          <p:cNvPr id="17" name="text16" descr="sci-ppt:C2-E32-016"/>
-          <p:cNvSpPr txBox="1"/>
-          <p:nvPr/>
-        </p:nvSpPr>
-        <p:spPr>
-          <a:xfrm>
-            <a:off x="6156960" y="4974336"/>
-            <a:ext cx="5547360" cy="321259"/>
-          </a:xfrm>
-          <a:prstGeom prst="rect">
-            <a:avLst/>
-          </a:prstGeom>
-          <a:noFill/>
-          <a:effectLst/>
-        </p:spPr>
-        <p:txBody>
-          <a:bodyPr wrap="none" lIns="27432" rIns="27432" tIns="18288" bIns="18288" anchor="ctr">
-            <a:spAutoFit/>
-          </a:bodyPr>
-          <a:lstStyle/>
-          <a:p>
-            <a:pPr algn="l">
-              <a:spcAft>
-                <a:spcPts val="0"/>
-              </a:spcAft>
-            </a:pPr>
-            <a:r>
-              <a:rPr sz="1632" b="0" i="0">
-                <a:solidFill>
-                  <a:srgbClr val="E7F0F3"/>
-                </a:solidFill>
-                <a:latin typeface="Arial"/>
-              </a:rPr>
-              <a:t>f_geo, A_λ: interception and absorption</a:t>
-            </a:r>
-          </a:p>
-        </p:txBody>
-      </p:sp>
-      <p:sp>
-        <p:nvSpPr>
-          <p:cNvPr id="18" name="text17" descr="sci-ppt:C2-E32-017"/>
-          <p:cNvSpPr txBox="1"/>
-          <p:nvPr/>
-        </p:nvSpPr>
-        <p:spPr>
-          <a:xfrm>
-            <a:off x="6156960" y="5266944"/>
-            <a:ext cx="5547360" cy="321259"/>
-          </a:xfrm>
-          <a:prstGeom prst="rect">
-            <a:avLst/>
-          </a:prstGeom>
-          <a:noFill/>
-          <a:effectLst/>
-        </p:spPr>
-        <p:txBody>
-          <a:bodyPr wrap="none" lIns="27432" rIns="27432" tIns="18288" bIns="18288" anchor="ctr">
-            <a:spAutoFit/>
-          </a:bodyPr>
-          <a:lstStyle/>
-          <a:p>
-            <a:pPr algn="l">
-              <a:spcAft>
-                <a:spcPts val="0"/>
-              </a:spcAft>
-            </a:pPr>
-            <a:r>
-              <a:rPr sz="1632" b="0" i="0">
-                <a:solidFill>
-                  <a:srgbClr val="E7F0F3"/>
-                </a:solidFill>
-                <a:latin typeface="Arial"/>
-              </a:rPr>
-              <a:t>L_h: distance to PFC</a:t>
-            </a:r>
-          </a:p>
-        </p:txBody>
-      </p:sp>
-      <p:sp>
-        <p:nvSpPr>
-          <p:cNvPr id="19" name="text18" descr="sci-ppt:C2-E32-018"/>
-          <p:cNvSpPr txBox="1"/>
-          <p:nvPr/>
-        </p:nvSpPr>
-        <p:spPr>
-          <a:xfrm>
-            <a:off x="6156960" y="5559552"/>
-            <a:ext cx="5547360" cy="321259"/>
-          </a:xfrm>
-          <a:prstGeom prst="rect">
-            <a:avLst/>
-          </a:prstGeom>
-          <a:noFill/>
-          <a:effectLst/>
-        </p:spPr>
-        <p:txBody>
-          <a:bodyPr wrap="none" lIns="27432" rIns="27432" tIns="18288" bIns="18288" anchor="ctr">
-            <a:spAutoFit/>
-          </a:bodyPr>
-          <a:lstStyle/>
-          <a:p>
-            <a:pPr algn="l">
-              <a:spcAft>
-                <a:spcPts val="0"/>
-              </a:spcAft>
-            </a:pPr>
-            <a:r>
-              <a:rPr sz="1632" b="0" i="0">
-                <a:solidFill>
-                  <a:srgbClr val="E7F0F3"/>
-                </a:solidFill>
-                <a:latin typeface="Arial"/>
-              </a:rPr>
-              <a:t>t_th, δ_T: thermal tests</a:t>
-            </a:r>
-          </a:p>
-        </p:txBody>
-      </p:sp>
-      <p:sp>
-        <p:nvSpPr>
-          <p:cNvPr id="20" name="text19" descr="sci-ppt:C2-E32-019"/>
-          <p:cNvSpPr txBox="1"/>
-          <p:nvPr/>
-        </p:nvSpPr>
-        <p:spPr>
-          <a:xfrm>
-            <a:off x="365760" y="6339840"/>
-            <a:ext cx="11277600" cy="302361"/>
-          </a:xfrm>
-          <a:prstGeom prst="rect">
-            <a:avLst/>
-          </a:prstGeom>
-          <a:noFill/>
-          <a:effectLst/>
-        </p:spPr>
-        <p:txBody>
-          <a:bodyPr wrap="none" lIns="27432" rIns="27432" tIns="18288" bIns="18288" anchor="ctr">
-            <a:spAutoFit/>
-          </a:bodyPr>
-          <a:lstStyle/>
-          <a:p>
-            <a:pPr algn="l">
-              <a:spcAft>
-                <a:spcPts val="0"/>
-              </a:spcAft>
-            </a:pPr>
-            <a:r>
-              <a:rPr sz="1536" b="0" i="0">
+              <a:rPr sz="1000" b="0" i="0">
                 <a:solidFill>
                   <a:srgbClr val="B4C7D2"/>
                 </a:solidFill>
                 <a:latin typeface="Arial"/>
               </a:rPr>
-              <a:t>Light enters the absorber first</a:t>
-            </a:r>
-          </a:p>
-        </p:txBody>
-      </p:sp>
-      <p:sp>
-        <p:nvSpPr>
-          <p:cNvPr id="21" name="text20" descr="sci-ppt:C2-E32-020"/>
-          <p:cNvSpPr txBox="1"/>
-          <p:nvPr/>
-        </p:nvSpPr>
-        <p:spPr>
-          <a:xfrm>
-            <a:off x="365760" y="6632448"/>
-            <a:ext cx="11277600" cy="302361"/>
-          </a:xfrm>
-          <a:prstGeom prst="rect">
-            <a:avLst/>
-          </a:prstGeom>
-          <a:noFill/>
-          <a:effectLst/>
-        </p:spPr>
-        <p:txBody>
-          <a:bodyPr wrap="none" lIns="27432" rIns="27432" tIns="18288" bIns="18288" anchor="ctr">
-            <a:spAutoFit/>
-          </a:bodyPr>
-          <a:lstStyle/>
-          <a:p>
-            <a:pPr algn="l">
-              <a:spcAft>
-                <a:spcPts val="0"/>
-              </a:spcAft>
-            </a:pPr>
-            <a:r>
-              <a:rPr sz="1536" b="0" i="0">
-                <a:solidFill>
-                  <a:srgbClr val="B4C7D2"/>
-                </a:solidFill>
-                <a:latin typeface="Arial"/>
-              </a:rPr>
-              <a:t>Heat then travels to the phase-changing material</a:t>
+              <a:t>Reference formulas of the Defence 1 answer: Eqs. C2-E02, E06, E09.</a:t>
             </a:r>
           </a:p>
         </p:txBody>
